--- a/docs/instructions/English/EU_SAE_Workbench_Guide_2_Running_the_Workbench.pptx
+++ b/docs/instructions/English/EU_SAE_Workbench_Guide_2_Running_the_Workbench.pptx
@@ -648,7 +648,7 @@
           <a:p>
             <a:r>
               <a:rPr lang="en-US" dirty="0"/>
-              <a:t>Current defaults: UFH arcsin for FGT0 with its separate effective-sample-size variance; sm_all for no transformation or log mean welfare. The UFH variance selector is available and honored for log models. MFH defaults to sm_all and rho_sm_all, MFH2 and AIC. Explicit saved choices are retained. An omitted MFH covariance setting follows the effective variance choice. sm_out remains an optional sensitivity with its unchanged 0.001 cutoff on the modeled scale. These screenshots and 100-replicate results are historical w5o examples, not runs under the new defaults.</a:t>
+              <a:t>Current defaults: UFH arcsin for FGT0 with its separate effective-sample-size variance; sm_out for no transformation or log mean welfare. The UFH variance selector is available and honored for log models. MFH defaults to sm_out and rho_sm_out, MFH2 and AIC. Explicit saved choices are retained. An omitted MFH covariance setting follows the effective variance choice. sm_out keeps its 0.001 cutoff on the modeled scale. sm_all remains an option; because its GVF uses sample size only, it can overstate the variances of low-poverty areas (guidelines note, Section 6.6). These screenshots and 100-replicate results are historical w5o examples.</a:t>
             </a:r>
             <a:endParaRPr lang="en-US" dirty="0"/>
           </a:p>
@@ -3666,7 +3666,7 @@
                   <a:srgbClr val="33415C"/>
                 </a:solidFill>
               </a:rPr>
-              <a:t>MFH2, sm_all / rho_sm_all, 500 replicates. Explicit saved choices are retained.</a:t>
+              <a:t>MFH2, sm_out / rho_sm_out, 500 replicates. Explicit saved choices are retained.</a:t>
             </a:r>
             <a:endParaRPr lang="en-US" sz="1150" dirty="0"/>
           </a:p>

--- a/docs/instructions/English/EU_SAE_Workbench_Guide_2_Running_the_Workbench.pptx
+++ b/docs/instructions/English/EU_SAE_Workbench_Guide_2_Running_the_Workbench.pptx
@@ -3702,7 +3702,7 @@
                   <a:srgbClr val="16233D"/>
                 </a:solidFill>
               </a:rPr>
-              <a:t>PSU codes consistent</a:t>
+              <a:t>Cross-year PSU design</a:t>
             </a:r>
             <a:endParaRPr lang="en-US" sz="1150" dirty="0"/>
           </a:p>
@@ -3716,7 +3716,7 @@
                   <a:srgbClr val="33415C"/>
                 </a:solidFill>
               </a:rPr>
-              <a:t>Under Data assessment: tick only if codes mean the same units in both years.</a:t>
+              <a:t>Choose from the survey design. MFH does not run while it is Not specified.</a:t>
             </a:r>
             <a:endParaRPr lang="en-US" sz="1150" dirty="0"/>
           </a:p>
